--- a/mineru/model/pptx/powerpoint_sample.pptx
+++ b/mineru/model/pptx/powerpoint_sample.pptx
@@ -4420,7 +4420,7 @@
         <p:spPr>
           <a:xfrm>
             <a:off x="2423634" y="2434665"/>
-            <a:ext cx="1613535" cy="922020"/>
+            <a:ext cx="1616710" cy="922020"/>
           </a:xfrm>
           <a:prstGeom prst="rect">
             <a:avLst/>
@@ -4439,7 +4439,11 @@
             </a:pPr>
             <a:r>
               <a:rPr lang="en-US" dirty="0"/>
-              <a:t>List item4</a:t>
+              <a:t>List </a:t>
+            </a:r>
+            <a:r>
+              <a:rPr lang="en-US" b="1" dirty="0"/>
+              <a:t>item4</a:t>
             </a:r>
             <a:endParaRPr lang="en-US" dirty="0"/>
           </a:p>
@@ -4450,7 +4454,11 @@
             </a:pPr>
             <a:r>
               <a:rPr lang="en-US" dirty="0"/>
-              <a:t>List item5</a:t>
+              <a:t>List </a:t>
+            </a:r>
+            <a:r>
+              <a:rPr lang="en-US" i="1" dirty="0"/>
+              <a:t>item5</a:t>
             </a:r>
             <a:endParaRPr lang="en-US" dirty="0"/>
           </a:p>
@@ -4461,9 +4469,13 @@
             </a:pPr>
             <a:r>
               <a:rPr lang="en-US" dirty="0"/>
-              <a:t>List item6</a:t>
-            </a:r>
-            <a:endParaRPr lang="en-US" dirty="0"/>
+              <a:t>List </a:t>
+            </a:r>
+            <a:r>
+              <a:rPr lang="en-US" u="sng" dirty="0"/>
+              <a:t>item6</a:t>
+            </a:r>
+            <a:endParaRPr lang="en-US" u="sng" dirty="0"/>
           </a:p>
         </p:txBody>
       </p:sp>
@@ -4607,7 +4619,7 @@
         <p:spPr>
           <a:xfrm>
             <a:off x="7531336" y="2459421"/>
-            <a:ext cx="1478290" cy="1200329"/>
+            <a:ext cx="2663825" cy="1753235"/>
           </a:xfrm>
           <a:prstGeom prst="rect">
             <a:avLst/>
@@ -4642,6 +4654,17 @@
             <a:endParaRPr lang="en-US" dirty="0"/>
           </a:p>
           <a:p>
+            <a:pPr marL="800100" lvl="1" indent="-342900">
+              <a:buFont typeface="+mj-lt"/>
+              <a:buAutoNum type="arabicPeriod"/>
+            </a:pPr>
+            <a:r>
+              <a:rPr lang="en-US" dirty="0"/>
+              <a:t>subitem</a:t>
+            </a:r>
+            <a:endParaRPr lang="en-US" dirty="0"/>
+          </a:p>
+          <a:p>
             <a:pPr marL="342900" indent="-342900">
               <a:buFont typeface="+mj-lt"/>
               <a:buAutoNum type="arabicPeriod"/>
@@ -4653,6 +4676,17 @@
             <a:endParaRPr lang="en-US" dirty="0"/>
           </a:p>
           <a:p>
+            <a:pPr marL="1257300" lvl="2" indent="-342900">
+              <a:buFont typeface="+mj-lt"/>
+              <a:buAutoNum type="arabicPeriod"/>
+            </a:pPr>
+            <a:r>
+              <a:rPr lang="en-US" dirty="0"/>
+              <a:t>subsubitem</a:t>
+            </a:r>
+            <a:endParaRPr lang="en-US" dirty="0"/>
+          </a:p>
+          <a:p>
             <a:pPr marL="342900" indent="-342900">
               <a:buFont typeface="+mj-lt"/>
               <a:buAutoNum type="arabicPeriod"/>
@@ -4660,62 +4694,6 @@
             <a:r>
               <a:rPr lang="en-US" dirty="0"/>
               <a:t>List3</a:t>
-            </a:r>
-            <a:endParaRPr lang="en-US" dirty="0"/>
-          </a:p>
-        </p:txBody>
-      </p:sp>
-      <p:sp>
-        <p:nvSpPr>
-          <p:cNvPr id="8" name="TextBox 7"/>
-          <p:cNvSpPr txBox="1"/>
-          <p:nvPr/>
-        </p:nvSpPr>
-        <p:spPr>
-          <a:xfrm>
-            <a:off x="9404392" y="2434665"/>
-            <a:ext cx="655949" cy="923330"/>
-          </a:xfrm>
-          <a:prstGeom prst="rect">
-            <a:avLst/>
-          </a:prstGeom>
-          <a:noFill/>
-        </p:spPr>
-        <p:txBody>
-          <a:bodyPr wrap="square" rtlCol="0">
-            <a:spAutoFit/>
-          </a:bodyPr>
-          <a:lstStyle/>
-          <a:p>
-            <a:pPr marL="285750" indent="-285750">
-              <a:buFont typeface="Arial" panose="02080604020202020204" pitchFamily="34" charset="0"/>
-              <a:buChar char="•"/>
-            </a:pPr>
-            <a:r>
-              <a:rPr lang="en-GB" dirty="0"/>
-              <a:t>l1 </a:t>
-            </a:r>
-            <a:endParaRPr lang="en-GB" dirty="0"/>
-          </a:p>
-          <a:p>
-            <a:pPr marL="285750" indent="-285750">
-              <a:buFont typeface="Arial" panose="02080604020202020204" pitchFamily="34" charset="0"/>
-              <a:buChar char="•"/>
-            </a:pPr>
-            <a:r>
-              <a:rPr lang="en-GB" dirty="0"/>
-              <a:t>l2</a:t>
-            </a:r>
-            <a:endParaRPr lang="en-GB" dirty="0"/>
-          </a:p>
-          <a:p>
-            <a:pPr marL="285750" indent="-285750">
-              <a:buFont typeface="Arial" panose="02080604020202020204" pitchFamily="34" charset="0"/>
-              <a:buChar char="•"/>
-            </a:pPr>
-            <a:r>
-              <a:rPr lang="en-US" dirty="0"/>
-              <a:t>l3</a:t>
             </a:r>
             <a:endParaRPr lang="en-US" dirty="0"/>
           </a:p>
